--- a/AI漫剧制作课程/PPT课件/模块09-角色一致性.pptx
+++ b/AI漫剧制作课程/PPT课件/模块09-角色一致性.pptx
@@ -12222,7 +12222,7 @@
               </a:defRPr>
             </a:pPr>
             <a:r>
-              <a:t>🛠️  本模块实操任务</a:t>
+              <a:t>◆  本模块实操任务</a:t>
             </a:r>
           </a:p>
         </p:txBody>
@@ -15989,7 +15989,7 @@
               </a:defRPr>
             </a:pPr>
             <a:r>
-              <a:t>✓</a:t>
+              <a:t>◆</a:t>
             </a:r>
           </a:p>
         </p:txBody>
@@ -18106,7 +18106,7 @@
               </a:defRPr>
             </a:pPr>
             <a:r>
-              <a:t>📋  本节内容</a:t>
+              <a:t>§  本节内容</a:t>
             </a:r>
           </a:p>
         </p:txBody>
@@ -21008,7 +21008,7 @@
               </a:defRPr>
             </a:pPr>
             <a:r>
-              <a:t>🎯 六大一致性方案速览</a:t>
+              <a:t>◎ 六大一致性方案速览</a:t>
             </a:r>
           </a:p>
         </p:txBody>
@@ -21521,7 +21521,7 @@
               </a:defRPr>
             </a:pPr>
             <a:r>
-              <a:t>🖼️</a:t>
+              <a:t>◆️</a:t>
             </a:r>
           </a:p>
         </p:txBody>
@@ -22018,7 +22018,7 @@
               </a:defRPr>
             </a:pPr>
             <a:r>
-              <a:t>📋</a:t>
+              <a:t>§</a:t>
             </a:r>
           </a:p>
         </p:txBody>
@@ -22515,7 +22515,7 @@
               </a:defRPr>
             </a:pPr>
             <a:r>
-              <a:t>🔌</a:t>
+              <a:t>◇</a:t>
             </a:r>
           </a:p>
         </p:txBody>
@@ -23012,7 +23012,7 @@
               </a:defRPr>
             </a:pPr>
             <a:r>
-              <a:t>🧠</a:t>
+              <a:t>◆</a:t>
             </a:r>
           </a:p>
         </p:txBody>
@@ -23509,7 +23509,7 @@
               </a:defRPr>
             </a:pPr>
             <a:r>
-              <a:t>🔧</a:t>
+              <a:t>◆</a:t>
             </a:r>
           </a:p>
         </p:txBody>
@@ -24006,7 +24006,7 @@
               </a:defRPr>
             </a:pPr>
             <a:r>
-              <a:t>📦</a:t>
+              <a:t>■</a:t>
             </a:r>
           </a:p>
         </p:txBody>
